--- a/KUKA_PRODUTOS_INFANTIS_LTDA.pptx
+++ b/KUKA_PRODUTOS_INFANTIS_LTDA.pptx
@@ -143,13 +143,10 @@
           </c:spPr>
           <c:cat>
             <c:strRef>
-              <c:f>Sheet1!$A$2:$A$3</c:f>
+              <c:f>Sheet1!$A$2:$A$2</c:f>
               <c:strCache>
-                <c:ptCount val="2"/>
+                <c:ptCount val="1"/>
                 <c:pt idx="0">
-                  <c:v>Abril 2026</c:v>
-                </c:pt>
-                <c:pt idx="1">
                   <c:v>Maio 2026</c:v>
                 </c:pt>
               </c:strCache>
@@ -157,15 +154,12 @@
           </c:cat>
           <c:val>
             <c:numRef>
-              <c:f>Sheet1!$B$2:$B$3</c:f>
+              <c:f>Sheet1!$B$2:$B$2</c:f>
               <c:numCache>
                 <c:formatCode>General</c:formatCode>
-                <c:ptCount val="2"/>
+                <c:ptCount val="1"/>
                 <c:pt idx="0">
-                  <c:v>0</c:v>
-                </c:pt>
-                <c:pt idx="1">
-                  <c:v>23</c:v>
+                  <c:v>51</c:v>
                 </c:pt>
               </c:numCache>
             </c:numRef>
@@ -192,13 +186,10 @@
           </c:spPr>
           <c:cat>
             <c:strRef>
-              <c:f>Sheet1!$A$2:$A$3</c:f>
+              <c:f>Sheet1!$A$2:$A$2</c:f>
               <c:strCache>
-                <c:ptCount val="2"/>
+                <c:ptCount val="1"/>
                 <c:pt idx="0">
-                  <c:v>Abril 2026</c:v>
-                </c:pt>
-                <c:pt idx="1">
                   <c:v>Maio 2026</c:v>
                 </c:pt>
               </c:strCache>
@@ -206,14 +197,11 @@
           </c:cat>
           <c:val>
             <c:numRef>
-              <c:f>Sheet1!$C$2:$C$3</c:f>
+              <c:f>Sheet1!$C$2:$C$2</c:f>
               <c:numCache>
                 <c:formatCode>General</c:formatCode>
-                <c:ptCount val="2"/>
+                <c:ptCount val="1"/>
                 <c:pt idx="0">
-                  <c:v>0</c:v>
-                </c:pt>
-                <c:pt idx="1">
                   <c:v>2</c:v>
                 </c:pt>
               </c:numCache>
@@ -3494,14 +3482,13 @@
           <a:p>
             <a:pPr algn="ctr"/>
             <a:r>
-              <a:rPr sz="1600" b="1">
+              <a:rPr sz="1400" b="1">
                 <a:solidFill>
                   <a:srgbClr val="FFFFFF"/>
                 </a:solidFill>
                 <a:latin typeface="Calibri"/>
               </a:rPr>
-              <a:t>Nossa rota e ir alem das
-entregas!</a:t>
+              <a:t>Nossa rota e ir alem das entregas!</a:t>
             </a:r>
           </a:p>
         </p:txBody>
@@ -3709,7 +3696,7 @@
                 </a:solidFill>
                 <a:latin typeface="Calibri"/>
               </a:rPr>
-              <a:t>25</a:t>
+              <a:t>53</a:t>
             </a:r>
           </a:p>
         </p:txBody>
@@ -3824,7 +3811,7 @@
                 </a:solidFill>
                 <a:latin typeface="Calibri"/>
               </a:rPr>
-              <a:t>23</a:t>
+              <a:t>51</a:t>
             </a:r>
           </a:p>
         </p:txBody>
@@ -4050,11 +4037,11 @@
             <a:r>
               <a:rPr sz="2800" b="1">
                 <a:solidFill>
-                  <a:srgbClr val="F59E0B"/>
+                  <a:srgbClr val="10B981"/>
                 </a:solidFill>
                 <a:latin typeface="Calibri"/>
               </a:rPr>
-              <a:t>92.0%</a:t>
+              <a:t>96.2%</a:t>
             </a:r>
           </a:p>
         </p:txBody>
@@ -4249,7 +4236,7 @@
                           </a:solidFill>
                           <a:latin typeface="Calibri"/>
                         </a:rPr>
-                        <a:t>0</a:t>
+                        <a:t>-</a:t>
                       </a:r>
                     </a:p>
                   </a:txBody>
@@ -4272,7 +4259,7 @@
                           </a:solidFill>
                           <a:latin typeface="Calibri"/>
                         </a:rPr>
-                        <a:t>25</a:t>
+                        <a:t>53</a:t>
                       </a:r>
                     </a:p>
                   </a:txBody>
@@ -4295,7 +4282,7 @@
                           </a:solidFill>
                           <a:latin typeface="Calibri"/>
                         </a:rPr>
-                        <a:t>+ 25</a:t>
+                        <a:t>-</a:t>
                       </a:r>
                     </a:p>
                   </a:txBody>
@@ -4343,7 +4330,7 @@
                           </a:solidFill>
                           <a:latin typeface="Calibri"/>
                         </a:rPr>
-                        <a:t>0</a:t>
+                        <a:t>-</a:t>
                       </a:r>
                     </a:p>
                   </a:txBody>
@@ -4366,7 +4353,7 @@
                           </a:solidFill>
                           <a:latin typeface="Calibri"/>
                         </a:rPr>
-                        <a:t>23</a:t>
+                        <a:t>51</a:t>
                       </a:r>
                     </a:p>
                   </a:txBody>
@@ -4389,7 +4376,7 @@
                           </a:solidFill>
                           <a:latin typeface="Calibri"/>
                         </a:rPr>
-                        <a:t>+ 23</a:t>
+                        <a:t>-</a:t>
                       </a:r>
                     </a:p>
                   </a:txBody>
@@ -4437,7 +4424,7 @@
                           </a:solidFill>
                           <a:latin typeface="Calibri"/>
                         </a:rPr>
-                        <a:t>0</a:t>
+                        <a:t>-</a:t>
                       </a:r>
                     </a:p>
                   </a:txBody>
@@ -4483,7 +4470,7 @@
                           </a:solidFill>
                           <a:latin typeface="Calibri"/>
                         </a:rPr>
-                        <a:t>+ 2</a:t>
+                        <a:t>-</a:t>
                       </a:r>
                     </a:p>
                   </a:txBody>
@@ -4531,7 +4518,7 @@
                           </a:solidFill>
                           <a:latin typeface="Calibri"/>
                         </a:rPr>
-                        <a:t>92.0%</a:t>
+                        <a:t>96.2%</a:t>
                       </a:r>
                     </a:p>
                   </a:txBody>
@@ -4554,7 +4541,7 @@
                           </a:solidFill>
                           <a:latin typeface="Calibri"/>
                         </a:rPr>
-                        <a:t>92.0%</a:t>
+                        <a:t>96.2%</a:t>
                       </a:r>
                     </a:p>
                   </a:txBody>
@@ -4748,7 +4735,7 @@
         </p:nvGraphicFramePr>
         <p:xfrm>
           <a:off x="7955279" y="2286000"/>
-          <a:ext cx="4480560" cy="1316736"/>
+          <a:ext cx="4480560" cy="877824"/>
         </p:xfrm>
         <a:graphic>
           <a:graphicData uri="http://schemas.openxmlformats.org/drawingml/2006/table">
@@ -4894,7 +4881,7 @@
                           </a:solidFill>
                           <a:latin typeface="Calibri"/>
                         </a:rPr>
-                        <a:t>Abril 2026</a:t>
+                        <a:t>Maio 2026</a:t>
                       </a:r>
                     </a:p>
                   </a:txBody>
@@ -4917,7 +4904,7 @@
                           </a:solidFill>
                           <a:latin typeface="Calibri"/>
                         </a:rPr>
-                        <a:t>0</a:t>
+                        <a:t>53</a:t>
                       </a:r>
                     </a:p>
                   </a:txBody>
@@ -4940,7 +4927,7 @@
                           </a:solidFill>
                           <a:latin typeface="Calibri"/>
                         </a:rPr>
-                        <a:t>0</a:t>
+                        <a:t>51</a:t>
                       </a:r>
                     </a:p>
                   </a:txBody>
@@ -4963,7 +4950,7 @@
                           </a:solidFill>
                           <a:latin typeface="Calibri"/>
                         </a:rPr>
-                        <a:t>0</a:t>
+                        <a:t>2</a:t>
                       </a:r>
                     </a:p>
                   </a:txBody>
@@ -4986,130 +4973,13 @@
                           </a:solidFill>
                           <a:latin typeface="Calibri"/>
                         </a:rPr>
-                        <a:t>92.0%</a:t>
+                        <a:t>96.2%</a:t>
                       </a:r>
                     </a:p>
                   </a:txBody>
                   <a:tcPr>
                     <a:solidFill>
                       <a:srgbClr val="FFFFFF"/>
-                    </a:solidFill>
-                  </a:tcPr>
-                </a:tc>
-              </a:tr>
-              <a:tr h="438912">
-                <a:tc>
-                  <a:txBody>
-                    <a:bodyPr/>
-                    <a:lstStyle/>
-                    <a:p>
-                      <a:pPr algn="l"/>
-                      <a:r>
-                        <a:rPr sz="1000" b="0">
-                          <a:solidFill>
-                            <a:srgbClr val="1D1B43"/>
-                          </a:solidFill>
-                          <a:latin typeface="Calibri"/>
-                        </a:rPr>
-                        <a:t>Maio 2026</a:t>
-                      </a:r>
-                    </a:p>
-                  </a:txBody>
-                  <a:tcPr>
-                    <a:solidFill>
-                      <a:srgbClr val="F2F2F2"/>
-                    </a:solidFill>
-                  </a:tcPr>
-                </a:tc>
-                <a:tc>
-                  <a:txBody>
-                    <a:bodyPr/>
-                    <a:lstStyle/>
-                    <a:p>
-                      <a:pPr algn="l"/>
-                      <a:r>
-                        <a:rPr sz="1000" b="0">
-                          <a:solidFill>
-                            <a:srgbClr val="1D1B43"/>
-                          </a:solidFill>
-                          <a:latin typeface="Calibri"/>
-                        </a:rPr>
-                        <a:t>25</a:t>
-                      </a:r>
-                    </a:p>
-                  </a:txBody>
-                  <a:tcPr>
-                    <a:solidFill>
-                      <a:srgbClr val="F2F2F2"/>
-                    </a:solidFill>
-                  </a:tcPr>
-                </a:tc>
-                <a:tc>
-                  <a:txBody>
-                    <a:bodyPr/>
-                    <a:lstStyle/>
-                    <a:p>
-                      <a:pPr algn="l"/>
-                      <a:r>
-                        <a:rPr sz="1000" b="0">
-                          <a:solidFill>
-                            <a:srgbClr val="1D1B43"/>
-                          </a:solidFill>
-                          <a:latin typeface="Calibri"/>
-                        </a:rPr>
-                        <a:t>23</a:t>
-                      </a:r>
-                    </a:p>
-                  </a:txBody>
-                  <a:tcPr>
-                    <a:solidFill>
-                      <a:srgbClr val="F2F2F2"/>
-                    </a:solidFill>
-                  </a:tcPr>
-                </a:tc>
-                <a:tc>
-                  <a:txBody>
-                    <a:bodyPr/>
-                    <a:lstStyle/>
-                    <a:p>
-                      <a:pPr algn="l"/>
-                      <a:r>
-                        <a:rPr sz="1000" b="0">
-                          <a:solidFill>
-                            <a:srgbClr val="1D1B43"/>
-                          </a:solidFill>
-                          <a:latin typeface="Calibri"/>
-                        </a:rPr>
-                        <a:t>2</a:t>
-                      </a:r>
-                    </a:p>
-                  </a:txBody>
-                  <a:tcPr>
-                    <a:solidFill>
-                      <a:srgbClr val="F2F2F2"/>
-                    </a:solidFill>
-                  </a:tcPr>
-                </a:tc>
-                <a:tc>
-                  <a:txBody>
-                    <a:bodyPr/>
-                    <a:lstStyle/>
-                    <a:p>
-                      <a:pPr algn="l"/>
-                      <a:r>
-                        <a:rPr sz="1000" b="0">
-                          <a:solidFill>
-                            <a:srgbClr val="1D1B43"/>
-                          </a:solidFill>
-                          <a:latin typeface="Calibri"/>
-                        </a:rPr>
-                        <a:t>92.0%</a:t>
-                      </a:r>
-                    </a:p>
-                  </a:txBody>
-                  <a:tcPr>
-                    <a:solidFill>
-                      <a:srgbClr val="F2F2F2"/>
                     </a:solidFill>
                   </a:tcPr>
                 </a:tc>
@@ -5191,7 +5061,7 @@
                 </a:solidFill>
                 <a:latin typeface="Calibri"/>
               </a:rPr>
-              <a:t>PERFORMANCE: 92.0% - REGULAR</a:t>
+              <a:t>PERFORMANCE: 96.2% - EXCELENTE</a:t>
             </a:r>
           </a:p>
         </p:txBody>
@@ -5597,7 +5467,7 @@
                           </a:solidFill>
                           <a:latin typeface="Calibri"/>
                         </a:rPr>
-                        <a:t>283800</a:t>
+                        <a:t>285759</a:t>
                       </a:r>
                     </a:p>
                   </a:txBody>
@@ -5620,7 +5490,7 @@
                           </a:solidFill>
                           <a:latin typeface="Calibri"/>
                         </a:rPr>
-                        <a:t>LOJAS MILIUM LTDA - JOINVILLE / SC</a:t>
+                        <a:t>KUKA PRODUTOS INFANT - SAO PAULO / SP</a:t>
                       </a:r>
                     </a:p>
                   </a:txBody>
@@ -5643,7 +5513,7 @@
                           </a:solidFill>
                           <a:latin typeface="Calibri"/>
                         </a:rPr>
-                        <a:t>JOINVILLE/SC</a:t>
+                        <a:t>SAO PAULO/SP</a:t>
                       </a:r>
                     </a:p>
                   </a:txBody>
@@ -5666,7 +5536,7 @@
                           </a:solidFill>
                           <a:latin typeface="Calibri"/>
                         </a:rPr>
-                        <a:t>19/05/2026</a:t>
+                        <a:t>29/05/2026</a:t>
                       </a:r>
                     </a:p>
                   </a:txBody>
@@ -5842,7 +5712,7 @@
         </p:nvGraphicFramePr>
         <p:xfrm>
           <a:off x="731520" y="1920240"/>
-          <a:ext cx="10698480" cy="914400"/>
+          <a:ext cx="10698480" cy="1371600"/>
         </p:xfrm>
         <a:graphic>
           <a:graphicData uri="http://schemas.openxmlformats.org/drawingml/2006/table">
@@ -6035,7 +5905,7 @@
                           </a:solidFill>
                           <a:latin typeface="Calibri"/>
                         </a:rPr>
-                        <a:t>25</a:t>
+                        <a:t>52</a:t>
                       </a:r>
                     </a:p>
                   </a:txBody>
@@ -6058,7 +5928,7 @@
                           </a:solidFill>
                           <a:latin typeface="Calibri"/>
                         </a:rPr>
-                        <a:t>23</a:t>
+                        <a:t>51</a:t>
                       </a:r>
                     </a:p>
                   </a:txBody>
@@ -6081,7 +5951,7 @@
                           </a:solidFill>
                           <a:latin typeface="Calibri"/>
                         </a:rPr>
-                        <a:t>2</a:t>
+                        <a:t>1</a:t>
                       </a:r>
                     </a:p>
                   </a:txBody>
@@ -6104,7 +5974,7 @@
                           </a:solidFill>
                           <a:latin typeface="Calibri"/>
                         </a:rPr>
-                        <a:t>92.0%</a:t>
+                        <a:t>98.1%</a:t>
                       </a:r>
                     </a:p>
                   </a:txBody>
@@ -6127,13 +5997,153 @@
                           </a:solidFill>
                           <a:latin typeface="Calibri"/>
                         </a:rPr>
-                        <a:t>Regular</a:t>
+                        <a:t>Excelente</a:t>
                       </a:r>
                     </a:p>
                   </a:txBody>
                   <a:tcPr>
                     <a:solidFill>
                       <a:srgbClr val="FFFFFF"/>
+                    </a:solidFill>
+                  </a:tcPr>
+                </a:tc>
+              </a:tr>
+              <a:tr h="457200">
+                <a:tc>
+                  <a:txBody>
+                    <a:bodyPr/>
+                    <a:lstStyle/>
+                    <a:p>
+                      <a:pPr algn="l"/>
+                      <a:r>
+                        <a:rPr sz="1000" b="0">
+                          <a:solidFill>
+                            <a:srgbClr val="1D1B43"/>
+                          </a:solidFill>
+                          <a:latin typeface="Calibri"/>
+                        </a:rPr>
+                        <a:t>SP</a:t>
+                      </a:r>
+                    </a:p>
+                  </a:txBody>
+                  <a:tcPr>
+                    <a:solidFill>
+                      <a:srgbClr val="F2F2F2"/>
+                    </a:solidFill>
+                  </a:tcPr>
+                </a:tc>
+                <a:tc>
+                  <a:txBody>
+                    <a:bodyPr/>
+                    <a:lstStyle/>
+                    <a:p>
+                      <a:pPr algn="l"/>
+                      <a:r>
+                        <a:rPr sz="1000" b="0">
+                          <a:solidFill>
+                            <a:srgbClr val="1D1B43"/>
+                          </a:solidFill>
+                          <a:latin typeface="Calibri"/>
+                        </a:rPr>
+                        <a:t>1</a:t>
+                      </a:r>
+                    </a:p>
+                  </a:txBody>
+                  <a:tcPr>
+                    <a:solidFill>
+                      <a:srgbClr val="F2F2F2"/>
+                    </a:solidFill>
+                  </a:tcPr>
+                </a:tc>
+                <a:tc>
+                  <a:txBody>
+                    <a:bodyPr/>
+                    <a:lstStyle/>
+                    <a:p>
+                      <a:pPr algn="l"/>
+                      <a:r>
+                        <a:rPr sz="1000" b="0">
+                          <a:solidFill>
+                            <a:srgbClr val="1D1B43"/>
+                          </a:solidFill>
+                          <a:latin typeface="Calibri"/>
+                        </a:rPr>
+                        <a:t>0</a:t>
+                      </a:r>
+                    </a:p>
+                  </a:txBody>
+                  <a:tcPr>
+                    <a:solidFill>
+                      <a:srgbClr val="F2F2F2"/>
+                    </a:solidFill>
+                  </a:tcPr>
+                </a:tc>
+                <a:tc>
+                  <a:txBody>
+                    <a:bodyPr/>
+                    <a:lstStyle/>
+                    <a:p>
+                      <a:pPr algn="l"/>
+                      <a:r>
+                        <a:rPr sz="1000" b="0">
+                          <a:solidFill>
+                            <a:srgbClr val="1D1B43"/>
+                          </a:solidFill>
+                          <a:latin typeface="Calibri"/>
+                        </a:rPr>
+                        <a:t>1</a:t>
+                      </a:r>
+                    </a:p>
+                  </a:txBody>
+                  <a:tcPr>
+                    <a:solidFill>
+                      <a:srgbClr val="F2F2F2"/>
+                    </a:solidFill>
+                  </a:tcPr>
+                </a:tc>
+                <a:tc>
+                  <a:txBody>
+                    <a:bodyPr/>
+                    <a:lstStyle/>
+                    <a:p>
+                      <a:pPr algn="l"/>
+                      <a:r>
+                        <a:rPr sz="1000" b="0">
+                          <a:solidFill>
+                            <a:srgbClr val="1D1B43"/>
+                          </a:solidFill>
+                          <a:latin typeface="Calibri"/>
+                        </a:rPr>
+                        <a:t>0.0%</a:t>
+                      </a:r>
+                    </a:p>
+                  </a:txBody>
+                  <a:tcPr>
+                    <a:solidFill>
+                      <a:srgbClr val="F2F2F2"/>
+                    </a:solidFill>
+                  </a:tcPr>
+                </a:tc>
+                <a:tc>
+                  <a:txBody>
+                    <a:bodyPr/>
+                    <a:lstStyle/>
+                    <a:p>
+                      <a:pPr algn="l"/>
+                      <a:r>
+                        <a:rPr sz="1000" b="0">
+                          <a:solidFill>
+                            <a:srgbClr val="1D1B43"/>
+                          </a:solidFill>
+                          <a:latin typeface="Calibri"/>
+                        </a:rPr>
+                        <a:t>Atencao</a:t>
+                      </a:r>
+                    </a:p>
+                  </a:txBody>
+                  <a:tcPr>
+                    <a:solidFill>
+                      <a:srgbClr val="F2F2F2"/>
                     </a:solidFill>
                   </a:tcPr>
                 </a:tc>
@@ -6222,7 +6232,7 @@
                 </a:solidFill>
                 <a:latin typeface="Calibri"/>
               </a:rPr>
-              <a:t>TOP DESTINATARIOS (15 pontos)</a:t>
+              <a:t>TOP DESTINATARIOS (22 pontos)</a:t>
             </a:r>
           </a:p>
         </p:txBody>
@@ -6520,7 +6530,7 @@
                           </a:solidFill>
                           <a:latin typeface="Calibri"/>
                         </a:rPr>
-                        <a:t>11</a:t>
+                        <a:t>29</a:t>
                       </a:r>
                     </a:p>
                   </a:txBody>
@@ -6543,7 +6553,7 @@
                           </a:solidFill>
                           <a:latin typeface="Calibri"/>
                         </a:rPr>
-                        <a:t>11</a:t>
+                        <a:t>29</a:t>
                       </a:r>
                     </a:p>
                   </a:txBody>
@@ -6660,7 +6670,7 @@
                           </a:solidFill>
                           <a:latin typeface="Calibri"/>
                         </a:rPr>
-                        <a:t>BRASAO SUPERMERCADOS - CHAPECO / SC</a:t>
+                        <a:t>DROGASUL DISTRIB. DE - CHAPECO / SC</a:t>
                       </a:r>
                     </a:p>
                   </a:txBody>
@@ -6683,7 +6693,7 @@
                           </a:solidFill>
                           <a:latin typeface="Calibri"/>
                         </a:rPr>
-                        <a:t>1</a:t>
+                        <a:t>2</a:t>
                       </a:r>
                     </a:p>
                   </a:txBody>
@@ -6706,7 +6716,7 @@
                           </a:solidFill>
                           <a:latin typeface="Calibri"/>
                         </a:rPr>
-                        <a:t>1</a:t>
+                        <a:t>2</a:t>
                       </a:r>
                     </a:p>
                   </a:txBody>
@@ -6823,7 +6833,7 @@
                           </a:solidFill>
                           <a:latin typeface="Calibri"/>
                         </a:rPr>
-                        <a:t>BISTEK - SUPERMERCAD - ICARA / SC</a:t>
+                        <a:t>MASTER ATS SUPERMERC - XANXERE / SC</a:t>
                       </a:r>
                     </a:p>
                   </a:txBody>
@@ -6846,7 +6856,7 @@
                           </a:solidFill>
                           <a:latin typeface="Calibri"/>
                         </a:rPr>
-                        <a:t>1</a:t>
+                        <a:t>2</a:t>
                       </a:r>
                     </a:p>
                   </a:txBody>
@@ -6869,7 +6879,7 @@
                           </a:solidFill>
                           <a:latin typeface="Calibri"/>
                         </a:rPr>
-                        <a:t>1</a:t>
+                        <a:t>2</a:t>
                       </a:r>
                     </a:p>
                   </a:txBody>
@@ -6986,7 +6996,7 @@
                           </a:solidFill>
                           <a:latin typeface="Calibri"/>
                         </a:rPr>
-                        <a:t>COOPERATIVA DE PROD. - BLUMENAU / SC</a:t>
+                        <a:t>SUPERMERCADOS ARCHER - BRUSQUE / SC</a:t>
                       </a:r>
                     </a:p>
                   </a:txBody>
@@ -7009,7 +7019,7 @@
                           </a:solidFill>
                           <a:latin typeface="Calibri"/>
                         </a:rPr>
-                        <a:t>1</a:t>
+                        <a:t>2</a:t>
                       </a:r>
                     </a:p>
                   </a:txBody>
@@ -7032,7 +7042,7 @@
                           </a:solidFill>
                           <a:latin typeface="Calibri"/>
                         </a:rPr>
-                        <a:t>1</a:t>
+                        <a:t>2</a:t>
                       </a:r>
                     </a:p>
                   </a:txBody>
@@ -7149,7 +7159,7 @@
                           </a:solidFill>
                           <a:latin typeface="Calibri"/>
                         </a:rPr>
-                        <a:t>D&amp;D DISTRIBUIDOR - BRUSQUE / SC</a:t>
+                        <a:t>BRASAO SUPERMERCADOS - CHAPECO / SC</a:t>
                       </a:r>
                     </a:p>
                   </a:txBody>
@@ -7312,7 +7322,7 @@
                           </a:solidFill>
                           <a:latin typeface="Calibri"/>
                         </a:rPr>
-                        <a:t>DROGASUL DISTRIB. DE - CHAPECO / SC</a:t>
+                        <a:t>BISTEK - SUPERMERCAD - ICARA / SC</a:t>
                       </a:r>
                     </a:p>
                   </a:txBody>
@@ -7475,7 +7485,7 @@
                           </a:solidFill>
                           <a:latin typeface="Calibri"/>
                         </a:rPr>
-                        <a:t>GENESIO A. MENDES E - TUBARAO / SC</a:t>
+                        <a:t>DIMEOESTE COMERCIO D - SAO MIGUEL DO OESTE / SC</a:t>
                       </a:r>
                     </a:p>
                   </a:txBody>
@@ -7638,7 +7648,7 @@
                           </a:solidFill>
                           <a:latin typeface="Calibri"/>
                         </a:rPr>
-                        <a:t>KOCH HIPERMERCADO S/ - TIJUCAS / SC</a:t>
+                        <a:t>D&amp;D DISTRIBUIDOR - BRUSQUE / SC</a:t>
                       </a:r>
                     </a:p>
                   </a:txBody>
@@ -7801,7 +7811,7 @@
                           </a:solidFill>
                           <a:latin typeface="Calibri"/>
                         </a:rPr>
-                        <a:t>LOJAS DE DEPARTAMENT - JOINVILLE / SC</a:t>
+                        <a:t>COOPERATIVA DE PROD. - BLUMENAU / SC</a:t>
                       </a:r>
                     </a:p>
                   </a:txBody>
@@ -7964,7 +7974,7 @@
                           </a:solidFill>
                           <a:latin typeface="Calibri"/>
                         </a:rPr>
-                        <a:t>LOJAS MILIUM LTDA - JOINVILLE / SC</a:t>
+                        <a:t>GIASSI E CIA LTDA - ICARA / SC</a:t>
                       </a:r>
                     </a:p>
                   </a:txBody>
@@ -8010,6 +8020,29 @@
                           </a:solidFill>
                           <a:latin typeface="Calibri"/>
                         </a:rPr>
+                        <a:t>1</a:t>
+                      </a:r>
+                    </a:p>
+                  </a:txBody>
+                  <a:tcPr>
+                    <a:solidFill>
+                      <a:srgbClr val="F2F2F2"/>
+                    </a:solidFill>
+                  </a:tcPr>
+                </a:tc>
+                <a:tc>
+                  <a:txBody>
+                    <a:bodyPr/>
+                    <a:lstStyle/>
+                    <a:p>
+                      <a:pPr algn="l"/>
+                      <a:r>
+                        <a:rPr sz="1000" b="0">
+                          <a:solidFill>
+                            <a:srgbClr val="1D1B43"/>
+                          </a:solidFill>
+                          <a:latin typeface="Calibri"/>
+                        </a:rPr>
                         <a:t>0</a:t>
                       </a:r>
                     </a:p>
@@ -8033,7 +8066,7 @@
                           </a:solidFill>
                           <a:latin typeface="Calibri"/>
                         </a:rPr>
-                        <a:t>1</a:t>
+                        <a:t>100.0%</a:t>
                       </a:r>
                     </a:p>
                   </a:txBody>
@@ -8056,30 +8089,7 @@
                           </a:solidFill>
                           <a:latin typeface="Calibri"/>
                         </a:rPr>
-                        <a:t>0.0%</a:t>
-                      </a:r>
-                    </a:p>
-                  </a:txBody>
-                  <a:tcPr>
-                    <a:solidFill>
-                      <a:srgbClr val="F2F2F2"/>
-                    </a:solidFill>
-                  </a:tcPr>
-                </a:tc>
-                <a:tc>
-                  <a:txBody>
-                    <a:bodyPr/>
-                    <a:lstStyle/>
-                    <a:p>
-                      <a:pPr algn="l"/>
-                      <a:r>
-                        <a:rPr sz="1000" b="0">
-                          <a:solidFill>
-                            <a:srgbClr val="1D1B43"/>
-                          </a:solidFill>
-                          <a:latin typeface="Calibri"/>
-                        </a:rPr>
-                        <a:t>Atencao</a:t>
+                        <a:t>Excelente</a:t>
                       </a:r>
                     </a:p>
                   </a:txBody>
@@ -8127,7 +8137,7 @@
                           </a:solidFill>
                           <a:latin typeface="Calibri"/>
                         </a:rPr>
-                        <a:t>MONIARI SUPERMERCADO - ICARA / SC</a:t>
+                        <a:t>KOCH HIPERMERCADO S/ - TIJUCAS / SC</a:t>
                       </a:r>
                     </a:p>
                   </a:txBody>
@@ -8290,7 +8300,7 @@
                           </a:solidFill>
                           <a:latin typeface="Calibri"/>
                         </a:rPr>
-                        <a:t>PRADO SUPERMERCADO L - BIGUACU / SC</a:t>
+                        <a:t>KUKA PRODUTOS INFANT - SAO PAULO / SP</a:t>
                       </a:r>
                     </a:p>
                   </a:txBody>
@@ -8453,7 +8463,7 @@
                           </a:solidFill>
                           <a:latin typeface="Calibri"/>
                         </a:rPr>
-                        <a:t>PROEPI HIGIENE E PRO - BARRA VELHA / SC</a:t>
+                        <a:t>LOJAS DE DEPARTAMENT - JOINVILLE / SC</a:t>
                       </a:r>
                     </a:p>
                   </a:txBody>
@@ -8616,7 +8626,7 @@
                           </a:solidFill>
                           <a:latin typeface="Calibri"/>
                         </a:rPr>
-                        <a:t>SUPER LIDER ALIMENTO - TUBARAO / SC</a:t>
+                        <a:t>GENESIO A. MENDES E - TUBARAO / SC</a:t>
                       </a:r>
                     </a:p>
                   </a:txBody>
